--- a/resource/apresentacao_sistema_academia.pptx
+++ b/resource/apresentacao_sistema_academia.pptx
@@ -213,7 +213,7 @@
           </a:lstStyle>
           <a:p>
             <a:fld id="{C960E630-7F9F-4C4E-89BB-2ADE9062391A}" type="datetimeFigureOut">
-              <a:t>12/06/2026</a:t>
+              <a:t>14/06/2026</a:t>
             </a:fld>
             <a:endParaRPr lang="pt-BR"/>
           </a:p>
@@ -2909,7 +2909,7 @@
         </p:nvSpPr>
         <p:spPr>
           <a:xfrm>
-            <a:off x="6583680" y="4846320"/>
+            <a:off x="6583680" y="5486400"/>
             <a:ext cx="5303520" cy="365760"/>
           </a:xfrm>
           <a:prstGeom prst="rect">
@@ -3255,6 +3255,36 @@
           </a:p>
         </p:txBody>
       </p:sp>
+      <p:pic>
+        <p:nvPicPr>
+          <p:cNvPr id="14" name="Imagem 13">
+            <a:extLst>
+              <a:ext uri="{FF2B5EF4-FFF2-40B4-BE49-F238E27FC236}">
+                <a16:creationId xmlns:a16="http://schemas.microsoft.com/office/drawing/2014/main" id="{A2ED3C07-5FBA-08C8-D659-615BCC393555}"/>
+              </a:ext>
+            </a:extLst>
+          </p:cNvPr>
+          <p:cNvPicPr>
+            <a:picLocks noChangeAspect="1"/>
+          </p:cNvPicPr>
+          <p:nvPr/>
+        </p:nvPicPr>
+        <p:blipFill>
+          <a:blip r:embed="rId3"/>
+          <a:stretch>
+            <a:fillRect/>
+          </a:stretch>
+        </p:blipFill>
+        <p:spPr>
+          <a:xfrm>
+            <a:off x="7326068" y="1470041"/>
+            <a:ext cx="3997252" cy="3787631"/>
+          </a:xfrm>
+          <a:prstGeom prst="rect">
+            <a:avLst/>
+          </a:prstGeom>
+        </p:spPr>
+      </p:pic>
     </p:spTree>
     <p:extLst>
       <p:ext uri="{BB962C8B-B14F-4D97-AF65-F5344CB8AC3E}">
@@ -4251,7 +4281,7 @@
         </p:nvGraphicFramePr>
         <p:xfrm>
           <a:off x="548640" y="1554480"/>
-          <a:ext cx="11064240" cy="4206240"/>
+          <a:ext cx="11064240" cy="3840480"/>
         </p:xfrm>
         <a:graphic>
           <a:graphicData uri="http://schemas.openxmlformats.org/drawingml/2006/table">
